--- a/assets/powerpoints/module-n3-vetements/A2-le-u-de-jupe-et-le-ou-de-rouge.pptx
+++ b/assets/powerpoints/module-n3-vetements/A2-le-u-de-jupe-et-le-ou-de-rouge.pptx
@@ -10048,7 +10048,25 @@
                 </a:solidFill>
                 <a:latin typeface="Verdana"/>
               </a:rPr>
-              <a:t>Sans bouger la langue. Le son qui sort est le &lt;b&gt;u&lt;/b&gt; de « jupe ». C'est la seule méthode qui fonctionne à coup sûr, parce qu'elle part d'un son que presque toutes les langues possèdent — le i — au lieu de partir du ou, qui entraîne la langue au fond.</a:t>
+              <a:t>Sans bouger la langue. Le son qui sort est le </a:t>
+            </a:r>
+            <a:r>
+              <a:rPr sz="2000" b="1" i="0">
+                <a:solidFill>
+                  <a:srgbClr val="4B4F52"/>
+                </a:solidFill>
+                <a:latin typeface="Verdana"/>
+              </a:rPr>
+              <a:t>u</a:t>
+            </a:r>
+            <a:r>
+              <a:rPr sz="2000" b="0" i="0">
+                <a:solidFill>
+                  <a:srgbClr val="4B4F52"/>
+                </a:solidFill>
+                <a:latin typeface="Verdana"/>
+              </a:rPr>
+              <a:t> de « jupe ». C'est la seule méthode qui fonctionne à coup sûr, parce qu'elle part d'un son que presque toutes les langues possèdent — le i — au lieu de partir du ou, qui entraîne la langue au fond.</a:t>
             </a:r>
           </a:p>
         </p:txBody>
@@ -10388,7 +10406,115 @@
                 </a:solidFill>
                 <a:latin typeface="Verdana"/>
               </a:rPr>
-              <a:t>une j&lt;b&gt;u&lt;/b&gt;pe, un p&lt;b&gt;u&lt;/b&gt;ll, le tiss&lt;b&gt;u&lt;/b&gt; — et un f&lt;b&gt;ou&lt;/b&gt;lard, un bl&lt;b&gt;ou&lt;/b&gt;son, un b&lt;b&gt;ou&lt;/b&gt;ton.</a:t>
+              <a:t>une j</a:t>
+            </a:r>
+            <a:r>
+              <a:rPr sz="1500" b="1" i="0">
+                <a:solidFill>
+                  <a:srgbClr val="3A3D40"/>
+                </a:solidFill>
+                <a:latin typeface="Verdana"/>
+              </a:rPr>
+              <a:t>u</a:t>
+            </a:r>
+            <a:r>
+              <a:rPr sz="1500" b="0" i="0">
+                <a:solidFill>
+                  <a:srgbClr val="3A3D40"/>
+                </a:solidFill>
+                <a:latin typeface="Verdana"/>
+              </a:rPr>
+              <a:t>pe, un p</a:t>
+            </a:r>
+            <a:r>
+              <a:rPr sz="1500" b="1" i="0">
+                <a:solidFill>
+                  <a:srgbClr val="3A3D40"/>
+                </a:solidFill>
+                <a:latin typeface="Verdana"/>
+              </a:rPr>
+              <a:t>u</a:t>
+            </a:r>
+            <a:r>
+              <a:rPr sz="1500" b="0" i="0">
+                <a:solidFill>
+                  <a:srgbClr val="3A3D40"/>
+                </a:solidFill>
+                <a:latin typeface="Verdana"/>
+              </a:rPr>
+              <a:t>ll, le tiss</a:t>
+            </a:r>
+            <a:r>
+              <a:rPr sz="1500" b="1" i="0">
+                <a:solidFill>
+                  <a:srgbClr val="3A3D40"/>
+                </a:solidFill>
+                <a:latin typeface="Verdana"/>
+              </a:rPr>
+              <a:t>u</a:t>
+            </a:r>
+            <a:r>
+              <a:rPr sz="1500" b="0" i="0">
+                <a:solidFill>
+                  <a:srgbClr val="3A3D40"/>
+                </a:solidFill>
+                <a:latin typeface="Verdana"/>
+              </a:rPr>
+              <a:t> — et un f</a:t>
+            </a:r>
+            <a:r>
+              <a:rPr sz="1500" b="1" i="0">
+                <a:solidFill>
+                  <a:srgbClr val="3A3D40"/>
+                </a:solidFill>
+                <a:latin typeface="Verdana"/>
+              </a:rPr>
+              <a:t>ou</a:t>
+            </a:r>
+            <a:r>
+              <a:rPr sz="1500" b="0" i="0">
+                <a:solidFill>
+                  <a:srgbClr val="3A3D40"/>
+                </a:solidFill>
+                <a:latin typeface="Verdana"/>
+              </a:rPr>
+              <a:t>lard, un bl</a:t>
+            </a:r>
+            <a:r>
+              <a:rPr sz="1500" b="1" i="0">
+                <a:solidFill>
+                  <a:srgbClr val="3A3D40"/>
+                </a:solidFill>
+                <a:latin typeface="Verdana"/>
+              </a:rPr>
+              <a:t>ou</a:t>
+            </a:r>
+            <a:r>
+              <a:rPr sz="1500" b="0" i="0">
+                <a:solidFill>
+                  <a:srgbClr val="3A3D40"/>
+                </a:solidFill>
+                <a:latin typeface="Verdana"/>
+              </a:rPr>
+              <a:t>son, un b</a:t>
+            </a:r>
+            <a:r>
+              <a:rPr sz="1500" b="1" i="0">
+                <a:solidFill>
+                  <a:srgbClr val="3A3D40"/>
+                </a:solidFill>
+                <a:latin typeface="Verdana"/>
+              </a:rPr>
+              <a:t>ou</a:t>
+            </a:r>
+            <a:r>
+              <a:rPr sz="1500" b="0" i="0">
+                <a:solidFill>
+                  <a:srgbClr val="3A3D40"/>
+                </a:solidFill>
+                <a:latin typeface="Verdana"/>
+              </a:rPr>
+              <a:t>ton.</a:t>
             </a:r>
           </a:p>
         </p:txBody>
@@ -10506,13 +10632,76 @@
               </a:lnSpc>
             </a:pPr>
             <a:r>
+              <a:rPr sz="1500" b="1" i="0">
+                <a:solidFill>
+                  <a:srgbClr val="3A3D40"/>
+                </a:solidFill>
+                <a:latin typeface="Verdana"/>
+              </a:rPr>
+              <a:t>u</a:t>
+            </a:r>
+            <a:r>
               <a:rPr sz="1500" b="0" i="0">
                 <a:solidFill>
                   <a:srgbClr val="3A3D40"/>
                 </a:solidFill>
                 <a:latin typeface="Verdana"/>
               </a:rPr>
-              <a:t>&lt;b&gt;u&lt;/b&gt;ni se dit avec le u ; d&lt;b&gt;ou&lt;/b&gt;x, d&lt;b&gt;ou&lt;/b&gt;blé et l'&lt;b&gt;ou&lt;/b&gt;verture du magasin se disent avec le ou.</a:t>
+              <a:t>ni se dit avec le u ; d</a:t>
+            </a:r>
+            <a:r>
+              <a:rPr sz="1500" b="1" i="0">
+                <a:solidFill>
+                  <a:srgbClr val="3A3D40"/>
+                </a:solidFill>
+                <a:latin typeface="Verdana"/>
+              </a:rPr>
+              <a:t>ou</a:t>
+            </a:r>
+            <a:r>
+              <a:rPr sz="1500" b="0" i="0">
+                <a:solidFill>
+                  <a:srgbClr val="3A3D40"/>
+                </a:solidFill>
+                <a:latin typeface="Verdana"/>
+              </a:rPr>
+              <a:t>x, d</a:t>
+            </a:r>
+            <a:r>
+              <a:rPr sz="1500" b="1" i="0">
+                <a:solidFill>
+                  <a:srgbClr val="3A3D40"/>
+                </a:solidFill>
+                <a:latin typeface="Verdana"/>
+              </a:rPr>
+              <a:t>ou</a:t>
+            </a:r>
+            <a:r>
+              <a:rPr sz="1500" b="0" i="0">
+                <a:solidFill>
+                  <a:srgbClr val="3A3D40"/>
+                </a:solidFill>
+                <a:latin typeface="Verdana"/>
+              </a:rPr>
+              <a:t>blé et l'</a:t>
+            </a:r>
+            <a:r>
+              <a:rPr sz="1500" b="1" i="0">
+                <a:solidFill>
+                  <a:srgbClr val="3A3D40"/>
+                </a:solidFill>
+                <a:latin typeface="Verdana"/>
+              </a:rPr>
+              <a:t>ou</a:t>
+            </a:r>
+            <a:r>
+              <a:rPr sz="1500" b="0" i="0">
+                <a:solidFill>
+                  <a:srgbClr val="3A3D40"/>
+                </a:solidFill>
+                <a:latin typeface="Verdana"/>
+              </a:rPr>
+              <a:t>verture du magasin se disent avec le ou.</a:t>
             </a:r>
           </a:p>
         </p:txBody>
@@ -10636,7 +10825,43 @@
                 </a:solidFill>
                 <a:latin typeface="Verdana"/>
               </a:rPr>
-              <a:t>« t&lt;b&gt;u&lt;/b&gt; » et « t&lt;b&gt;ou&lt;/b&gt;t » ne veulent pas dire la même chose. Là, la confusion change vraiment la phrase.</a:t>
+              <a:t>« t</a:t>
+            </a:r>
+            <a:r>
+              <a:rPr sz="1500" b="1" i="0">
+                <a:solidFill>
+                  <a:srgbClr val="3A3D40"/>
+                </a:solidFill>
+                <a:latin typeface="Verdana"/>
+              </a:rPr>
+              <a:t>u</a:t>
+            </a:r>
+            <a:r>
+              <a:rPr sz="1500" b="0" i="0">
+                <a:solidFill>
+                  <a:srgbClr val="3A3D40"/>
+                </a:solidFill>
+                <a:latin typeface="Verdana"/>
+              </a:rPr>
+              <a:t> » et « t</a:t>
+            </a:r>
+            <a:r>
+              <a:rPr sz="1500" b="1" i="0">
+                <a:solidFill>
+                  <a:srgbClr val="3A3D40"/>
+                </a:solidFill>
+                <a:latin typeface="Verdana"/>
+              </a:rPr>
+              <a:t>ou</a:t>
+            </a:r>
+            <a:r>
+              <a:rPr sz="1500" b="0" i="0">
+                <a:solidFill>
+                  <a:srgbClr val="3A3D40"/>
+                </a:solidFill>
+                <a:latin typeface="Verdana"/>
+              </a:rPr>
+              <a:t>t » ne veulent pas dire la même chose. Là, la confusion change vraiment la phrase.</a:t>
             </a:r>
           </a:p>
         </p:txBody>
